--- a/docs/workshop/blog/WMDG-Workshop-Deinen-Kopf-durchdenken.pptx
+++ b/docs/workshop/blog/WMDG-Workshop-Deinen-Kopf-durchdenken.pptx
@@ -10727,25 +10727,21 @@
         </p:nvSpPr>
         <p:spPr>
           <a:xfrm>
-            <a:off x="868680" y="2194560"/>
-            <a:ext cx="10454335" cy="1463040"/>
-          </a:xfrm>
-          <a:prstGeom prst="rect">
-            <a:avLst/>
-          </a:prstGeom>
-          <a:noFill/>
-        </p:spPr>
-        <p:txBody>
-          <a:bodyPr wrap="square" anchor="ctr" lIns="0" rIns="0" tIns="0" bIns="0">
-            <a:noAutofit/>
-          </a:bodyPr>
-          <a:lstStyle/>
-          <a:p>
-            <a:pPr>
-              <a:lnSpc>
-                <a:spcPct val="105000"/>
-              </a:lnSpc>
-            </a:pPr>
+            <a:off x="914400" y="3749039"/>
+            <a:ext cx="10360152" cy="914400"/>
+          </a:xfrm>
+          <a:prstGeom prst="rect">
+            <a:avLst/>
+          </a:prstGeom>
+          <a:noFill/>
+        </p:spPr>
+        <p:txBody>
+          <a:bodyPr wrap="square" anchor="t" lIns="0" rIns="0" tIns="0" bIns="0">
+            <a:noAutofit/>
+          </a:bodyPr>
+          <a:lstStyle/>
+          <a:p>
+            <a:pPr algn="ctr"/>
             <a:r>
               <a:rPr sz="4000" b="1" i="0">
                 <a:solidFill>
@@ -10758,84 +10754,86 @@
             <a:r>
               <a:rPr sz="4000" b="1" i="0">
                 <a:solidFill>
+                  <a:srgbClr val="A3D64F"/>
+                </a:solidFill>
+                <a:latin typeface="Cambria"/>
+              </a:rPr>
+              <a:t>Gedanken</a:t>
+            </a:r>
+            <a:r>
+              <a:rPr sz="4000" b="1" i="0">
+                <a:solidFill>
+                  <a:srgbClr val="FFFFFF"/>
+                </a:solidFill>
+                <a:latin typeface="Cambria"/>
+              </a:rPr>
+              <a:t>.</a:t>
+            </a:r>
+          </a:p>
+        </p:txBody>
+      </p:sp>
+      <p:sp>
+        <p:nvSpPr>
+          <p:cNvPr id="4" name="TextBox 3"/>
+          <p:cNvSpPr txBox="1"/>
+          <p:nvPr/>
+        </p:nvSpPr>
+        <p:spPr>
+          <a:xfrm>
+            <a:off x="914400" y="4754880"/>
+            <a:ext cx="10360152" cy="457200"/>
+          </a:xfrm>
+          <a:prstGeom prst="rect">
+            <a:avLst/>
+          </a:prstGeom>
+          <a:noFill/>
+        </p:spPr>
+        <p:txBody>
+          <a:bodyPr wrap="square" anchor="t" lIns="0" rIns="0" tIns="0" bIns="0">
+            <a:noAutofit/>
+          </a:bodyPr>
+          <a:lstStyle/>
+          <a:p>
+            <a:pPr algn="ctr"/>
+            <a:r>
+              <a:rPr sz="1800" b="0" i="0">
+                <a:solidFill>
+                  <a:srgbClr val="C3CCDD"/>
+                </a:solidFill>
+                <a:latin typeface="Calibri"/>
+              </a:rPr>
+              <a:t>Danke, dass du heute dabei warst.</a:t>
+            </a:r>
+          </a:p>
+        </p:txBody>
+      </p:sp>
+      <p:sp>
+        <p:nvSpPr>
+          <p:cNvPr id="5" name="TextBox 4"/>
+          <p:cNvSpPr txBox="1"/>
+          <p:nvPr/>
+        </p:nvSpPr>
+        <p:spPr>
+          <a:xfrm>
+            <a:off x="914400" y="5852160"/>
+            <a:ext cx="10360152" cy="365760"/>
+          </a:xfrm>
+          <a:prstGeom prst="rect">
+            <a:avLst/>
+          </a:prstGeom>
+          <a:noFill/>
+        </p:spPr>
+        <p:txBody>
+          <a:bodyPr wrap="square" anchor="t" lIns="0" rIns="0" tIns="0" bIns="0">
+            <a:noAutofit/>
+          </a:bodyPr>
+          <a:lstStyle/>
+          <a:p>
+            <a:pPr algn="ctr"/>
+            <a:r>
+              <a:rPr sz="1400" b="1" i="0">
+                <a:solidFill>
                   <a:srgbClr val="34C4C4"/>
-                </a:solidFill>
-                <a:latin typeface="Cambria"/>
-              </a:rPr>
-              <a:t>Gedanken</a:t>
-            </a:r>
-            <a:r>
-              <a:rPr sz="4000" b="1" i="0">
-                <a:solidFill>
-                  <a:srgbClr val="FFFFFF"/>
-                </a:solidFill>
-                <a:latin typeface="Cambria"/>
-              </a:rPr>
-              <a:t>.</a:t>
-            </a:r>
-          </a:p>
-        </p:txBody>
-      </p:sp>
-      <p:sp>
-        <p:nvSpPr>
-          <p:cNvPr id="4" name="TextBox 3"/>
-          <p:cNvSpPr txBox="1"/>
-          <p:nvPr/>
-        </p:nvSpPr>
-        <p:spPr>
-          <a:xfrm>
-            <a:off x="868680" y="3977639"/>
-            <a:ext cx="10454335" cy="548640"/>
-          </a:xfrm>
-          <a:prstGeom prst="rect">
-            <a:avLst/>
-          </a:prstGeom>
-          <a:noFill/>
-        </p:spPr>
-        <p:txBody>
-          <a:bodyPr wrap="square" anchor="t" lIns="0" rIns="0" tIns="0" bIns="0">
-            <a:noAutofit/>
-          </a:bodyPr>
-          <a:lstStyle/>
-          <a:p>
-            <a:r>
-              <a:rPr sz="1700" b="0" i="0">
-                <a:solidFill>
-                  <a:srgbClr val="D8DBE6"/>
-                </a:solidFill>
-                <a:latin typeface="Calibri"/>
-              </a:rPr>
-              <a:t>Danke, dass du heute dabei warst.</a:t>
-            </a:r>
-          </a:p>
-        </p:txBody>
-      </p:sp>
-      <p:sp>
-        <p:nvSpPr>
-          <p:cNvPr id="5" name="TextBox 4"/>
-          <p:cNvSpPr txBox="1"/>
-          <p:nvPr/>
-        </p:nvSpPr>
-        <p:spPr>
-          <a:xfrm>
-            <a:off x="868680" y="5989320"/>
-            <a:ext cx="10454335" cy="365760"/>
-          </a:xfrm>
-          <a:prstGeom prst="rect">
-            <a:avLst/>
-          </a:prstGeom>
-          <a:noFill/>
-        </p:spPr>
-        <p:txBody>
-          <a:bodyPr wrap="square" anchor="t" lIns="0" rIns="0" tIns="0" bIns="0">
-            <a:noAutofit/>
-          </a:bodyPr>
-          <a:lstStyle/>
-          <a:p>
-            <a:r>
-              <a:rPr sz="1300" b="0" i="0">
-                <a:solidFill>
-                  <a:srgbClr val="AEB6C6"/>
                 </a:solidFill>
                 <a:latin typeface="Calibri"/>
               </a:rPr>

--- a/docs/workshop/blog/WMDG-Workshop-Deinen-Kopf-durchdenken.pptx
+++ b/docs/workshop/blog/WMDG-Workshop-Deinen-Kopf-durchdenken.pptx
@@ -10937,9 +10937,33 @@
           </a:prstGeom>
         </p:spPr>
       </p:pic>
-      <p:sp>
-        <p:nvSpPr>
-          <p:cNvPr id="3" name="TextBox 2"/>
+      <p:pic>
+        <p:nvPicPr>
+          <p:cNvPr id="3" name="Picture 2" descr="brain.png"/>
+          <p:cNvPicPr>
+            <a:picLocks noChangeAspect="1"/>
+          </p:cNvPicPr>
+          <p:nvPr/>
+        </p:nvPicPr>
+        <p:blipFill>
+          <a:blip r:embed="rId3"/>
+          <a:stretch>
+            <a:fillRect/>
+          </a:stretch>
+        </p:blipFill>
+        <p:spPr>
+          <a:xfrm>
+            <a:off x="5249872" y="1874519"/>
+            <a:ext cx="1691951" cy="1554480"/>
+          </a:xfrm>
+          <a:prstGeom prst="rect">
+            <a:avLst/>
+          </a:prstGeom>
+        </p:spPr>
+      </p:pic>
+      <p:sp>
+        <p:nvSpPr>
+          <p:cNvPr id="4" name="TextBox 3"/>
           <p:cNvSpPr txBox="1"/>
           <p:nvPr/>
         </p:nvSpPr>
@@ -10992,7 +11016,7 @@
       </p:sp>
       <p:sp>
         <p:nvSpPr>
-          <p:cNvPr id="4" name="TextBox 3"/>
+          <p:cNvPr id="5" name="TextBox 4"/>
           <p:cNvSpPr txBox="1"/>
           <p:nvPr/>
         </p:nvSpPr>
@@ -11027,7 +11051,7 @@
       </p:sp>
       <p:sp>
         <p:nvSpPr>
-          <p:cNvPr id="5" name="TextBox 4"/>
+          <p:cNvPr id="6" name="TextBox 5"/>
           <p:cNvSpPr txBox="1"/>
           <p:nvPr/>
         </p:nvSpPr>
